--- a/examples/caict-2024-sample.pptx
+++ b/examples/caict-2024-sample.pptx
@@ -5112,7 +5112,7 @@
                 <a:latin typeface="Microsoft YaHei"/>
                 <a:ea typeface="Microsoft YaHei"/>
               </a:rPr>
-              <a:t>caict_ai_2024.pdf 第 14-19、30-33 页</a:t>
+              <a:t>资料来源：中国信息通信研究院《人工智能发展报告（2024年）》第 14–19、30–33 页</a:t>
             </a:r>
           </a:p>
         </p:txBody>
@@ -5125,8 +5125,8 @@
         </p:nvSpPr>
         <p:spPr>
           <a:xfrm>
-            <a:off x="685800" y="2329474"/>
-            <a:ext cx="533400" cy="573786"/>
+            <a:off x="685800" y="2360953"/>
+            <a:ext cx="533400" cy="328117"/>
           </a:xfrm>
           <a:prstGeom prst="rect">
             <a:avLst/>
@@ -5141,11 +5141,11 @@
           <a:p>
             <a:pPr algn="l" eaLnBrk="1" hangingPunct="1" latinLnBrk="0">
               <a:lnSpc>
-                <a:spcPts val="2210"/>
-              </a:lnSpc>
-            </a:pPr>
-            <a:r>
-              <a:rPr sz="1700" b="1" i="0">
+                <a:spcPts val="2340"/>
+              </a:lnSpc>
+            </a:pPr>
+            <a:r>
+              <a:rPr sz="1800" b="1" i="0">
                 <a:solidFill>
                   <a:srgbClr val="D9822B"/>
                 </a:solidFill>
@@ -5165,8 +5165,8 @@
         </p:nvSpPr>
         <p:spPr>
           <a:xfrm>
-            <a:off x="1219200" y="2329474"/>
-            <a:ext cx="2263140" cy="573786"/>
+            <a:off x="1219200" y="2360953"/>
+            <a:ext cx="2263140" cy="328117"/>
           </a:xfrm>
           <a:prstGeom prst="rect">
             <a:avLst/>
@@ -5181,11 +5181,11 @@
           <a:p>
             <a:pPr algn="l" eaLnBrk="1" hangingPunct="1" latinLnBrk="0">
               <a:lnSpc>
-                <a:spcPts val="2210"/>
-              </a:lnSpc>
-            </a:pPr>
-            <a:r>
-              <a:rPr sz="1700" b="1" i="0" lang="zh-CN" altLang="en-US">
+                <a:spcPts val="2340"/>
+              </a:lnSpc>
+            </a:pPr>
+            <a:r>
+              <a:rPr sz="1800" b="1" i="0" lang="zh-CN" altLang="en-US">
                 <a:solidFill>
                   <a:srgbClr val="1A1F26"/>
                 </a:solidFill>
@@ -5205,8 +5205,8 @@
         </p:nvSpPr>
         <p:spPr>
           <a:xfrm>
-            <a:off x="3710940" y="2329474"/>
-            <a:ext cx="7261860" cy="573786"/>
+            <a:off x="3710940" y="2360953"/>
+            <a:ext cx="7795260" cy="328117"/>
           </a:xfrm>
           <a:prstGeom prst="rect">
             <a:avLst/>
@@ -5221,18 +5221,18 @@
           <a:p>
             <a:pPr algn="l" eaLnBrk="1" hangingPunct="1" latinLnBrk="0">
               <a:lnSpc>
-                <a:spcPts val="2100"/>
-              </a:lnSpc>
-            </a:pPr>
-            <a:r>
-              <a:rPr sz="1400" b="0" i="0" lang="zh-CN" altLang="en-US">
+                <a:spcPts val="2250"/>
+              </a:lnSpc>
+            </a:pPr>
+            <a:r>
+              <a:rPr sz="1500" b="0" i="0" lang="zh-CN" altLang="en-US">
                 <a:solidFill>
                   <a:srgbClr val="1A1F26"/>
                 </a:solidFill>
                 <a:latin typeface="Microsoft YaHei"/>
                 <a:ea typeface="Microsoft YaHei"/>
               </a:rPr>
-              <a:t>强化学习与思维链提升复杂推理，o1具备自我反思与错误修正能力（caict_ai_2024.pdf 第15-16页）</a:t>
+              <a:t>强化学习与思维链提升复杂推理，o1具备自我反思与错误修正能力（第 15–16 页）</a:t>
             </a:r>
           </a:p>
         </p:txBody>
@@ -5245,7 +5245,7 @@
         </p:nvCxnSpPr>
         <p:spPr>
           <a:xfrm>
-            <a:off x="685800" y="3094361"/>
+            <a:off x="685800" y="2911651"/>
             <a:ext cx="10820400" cy="0"/>
           </a:xfrm>
           <a:prstGeom prst="line">
@@ -5281,8 +5281,8 @@
         </p:nvSpPr>
         <p:spPr>
           <a:xfrm>
-            <a:off x="685800" y="3285463"/>
-            <a:ext cx="533400" cy="310947"/>
+            <a:off x="685800" y="3134231"/>
+            <a:ext cx="533400" cy="328117"/>
           </a:xfrm>
           <a:prstGeom prst="rect">
             <a:avLst/>
@@ -5297,11 +5297,11 @@
           <a:p>
             <a:pPr algn="l" eaLnBrk="1" hangingPunct="1" latinLnBrk="0">
               <a:lnSpc>
-                <a:spcPts val="2210"/>
-              </a:lnSpc>
-            </a:pPr>
-            <a:r>
-              <a:rPr sz="1700" b="1" i="0">
+                <a:spcPts val="2340"/>
+              </a:lnSpc>
+            </a:pPr>
+            <a:r>
+              <a:rPr sz="1800" b="1" i="0">
                 <a:solidFill>
                   <a:srgbClr val="D9822B"/>
                 </a:solidFill>
@@ -5321,8 +5321,8 @@
         </p:nvSpPr>
         <p:spPr>
           <a:xfrm>
-            <a:off x="1219200" y="3285463"/>
-            <a:ext cx="2263140" cy="310947"/>
+            <a:off x="1219200" y="3134231"/>
+            <a:ext cx="2263140" cy="328117"/>
           </a:xfrm>
           <a:prstGeom prst="rect">
             <a:avLst/>
@@ -5337,11 +5337,11 @@
           <a:p>
             <a:pPr algn="l" eaLnBrk="1" hangingPunct="1" latinLnBrk="0">
               <a:lnSpc>
-                <a:spcPts val="2210"/>
-              </a:lnSpc>
-            </a:pPr>
-            <a:r>
-              <a:rPr sz="1700" b="1" i="0" lang="zh-CN" altLang="en-US">
+                <a:spcPts val="2340"/>
+              </a:lnSpc>
+            </a:pPr>
+            <a:r>
+              <a:rPr sz="1800" b="1" i="0" lang="zh-CN" altLang="en-US">
                 <a:solidFill>
                   <a:srgbClr val="1A1F26"/>
                 </a:solidFill>
@@ -5361,8 +5361,8 @@
         </p:nvSpPr>
         <p:spPr>
           <a:xfrm>
-            <a:off x="3710940" y="3285463"/>
-            <a:ext cx="7795260" cy="310947"/>
+            <a:off x="3710940" y="3134231"/>
+            <a:ext cx="7795260" cy="328117"/>
           </a:xfrm>
           <a:prstGeom prst="rect">
             <a:avLst/>
@@ -5377,18 +5377,18 @@
           <a:p>
             <a:pPr algn="l" eaLnBrk="1" hangingPunct="1" latinLnBrk="0">
               <a:lnSpc>
-                <a:spcPts val="2100"/>
-              </a:lnSpc>
-            </a:pPr>
-            <a:r>
-              <a:rPr sz="1400" b="0" i="0" lang="zh-CN" altLang="en-US">
+                <a:spcPts val="2250"/>
+              </a:lnSpc>
+            </a:pPr>
+            <a:r>
+              <a:rPr sz="1500" b="0" i="0" lang="zh-CN" altLang="en-US">
                 <a:solidFill>
                   <a:srgbClr val="1A1F26"/>
                 </a:solidFill>
                 <a:latin typeface="Microsoft YaHei"/>
                 <a:ea typeface="Microsoft YaHei"/>
               </a:rPr>
-              <a:t>开放复杂场景泛化能力仍不强，幻觉问题无法彻底消除（caict_ai_2024.pdf 第16-17页）</a:t>
+              <a:t>开放复杂场景泛化能力仍不强，幻觉问题无法彻底消除（第 16–17 页）</a:t>
             </a:r>
           </a:p>
         </p:txBody>
@@ -5401,7 +5401,7 @@
         </p:nvCxnSpPr>
         <p:spPr>
           <a:xfrm>
-            <a:off x="685800" y="3787511"/>
+            <a:off x="685800" y="3684928"/>
             <a:ext cx="10820400" cy="0"/>
           </a:xfrm>
           <a:prstGeom prst="line">
@@ -5437,8 +5437,8 @@
         </p:nvSpPr>
         <p:spPr>
           <a:xfrm>
-            <a:off x="685800" y="3978612"/>
-            <a:ext cx="533400" cy="573786"/>
+            <a:off x="685800" y="3907509"/>
+            <a:ext cx="533400" cy="613410"/>
           </a:xfrm>
           <a:prstGeom prst="rect">
             <a:avLst/>
@@ -5453,11 +5453,11 @@
           <a:p>
             <a:pPr algn="l" eaLnBrk="1" hangingPunct="1" latinLnBrk="0">
               <a:lnSpc>
-                <a:spcPts val="2210"/>
-              </a:lnSpc>
-            </a:pPr>
-            <a:r>
-              <a:rPr sz="1700" b="1" i="0">
+                <a:spcPts val="2340"/>
+              </a:lnSpc>
+            </a:pPr>
+            <a:r>
+              <a:rPr sz="1800" b="1" i="0">
                 <a:solidFill>
                   <a:srgbClr val="D9822B"/>
                 </a:solidFill>
@@ -5477,8 +5477,8 @@
         </p:nvSpPr>
         <p:spPr>
           <a:xfrm>
-            <a:off x="1219200" y="3978612"/>
-            <a:ext cx="2263140" cy="573786"/>
+            <a:off x="1219200" y="3907509"/>
+            <a:ext cx="2263140" cy="613410"/>
           </a:xfrm>
           <a:prstGeom prst="rect">
             <a:avLst/>
@@ -5493,11 +5493,11 @@
           <a:p>
             <a:pPr algn="l" eaLnBrk="1" hangingPunct="1" latinLnBrk="0">
               <a:lnSpc>
-                <a:spcPts val="2210"/>
-              </a:lnSpc>
-            </a:pPr>
-            <a:r>
-              <a:rPr sz="1700" b="1" i="0" lang="zh-CN" altLang="en-US">
+                <a:spcPts val="2340"/>
+              </a:lnSpc>
+            </a:pPr>
+            <a:r>
+              <a:rPr sz="1800" b="1" i="0" lang="zh-CN" altLang="en-US">
                 <a:solidFill>
                   <a:srgbClr val="1A1F26"/>
                 </a:solidFill>
@@ -5517,8 +5517,8 @@
         </p:nvSpPr>
         <p:spPr>
           <a:xfrm>
-            <a:off x="3710940" y="3978612"/>
-            <a:ext cx="7795260" cy="573786"/>
+            <a:off x="3710940" y="3907509"/>
+            <a:ext cx="7604760" cy="613410"/>
           </a:xfrm>
           <a:prstGeom prst="rect">
             <a:avLst/>
@@ -5533,18 +5533,18 @@
           <a:p>
             <a:pPr algn="l" eaLnBrk="1" hangingPunct="1" latinLnBrk="0">
               <a:lnSpc>
-                <a:spcPts val="2100"/>
-              </a:lnSpc>
-            </a:pPr>
-            <a:r>
-              <a:rPr sz="1400" b="0" i="0" lang="zh-CN" altLang="en-US">
+                <a:spcPts val="2250"/>
+              </a:lnSpc>
+            </a:pPr>
+            <a:r>
+              <a:rPr sz="1500" b="0" i="0" lang="zh-CN" altLang="en-US">
                 <a:solidFill>
                   <a:srgbClr val="1A1F26"/>
                 </a:solidFill>
                 <a:latin typeface="Microsoft YaHei"/>
                 <a:ea typeface="Microsoft YaHei"/>
               </a:rPr>
-              <a:t>用领域微调、知识图谱与RAG增强事实依据，Agent和大小模型组合支撑落地（caict_ai_2024.pdf 第17-18页、第31页）</a:t>
+              <a:t>用领域微调、知识图谱与RAG增强事实依据，Agent和大小模型组合支撑落地（第 17–18、31 页）</a:t>
             </a:r>
           </a:p>
         </p:txBody>
@@ -5890,7 +5890,7 @@
                 <a:latin typeface="Microsoft YaHei"/>
                 <a:ea typeface="Microsoft YaHei"/>
               </a:rPr>
-              <a:t>caict_ai_2024.pdf 第 14-19、34-38 页</a:t>
+              <a:t>资料来源：中国信息通信研究院《人工智能发展报告（2024年）》第 14–19、34–38 页</a:t>
             </a:r>
           </a:p>
         </p:txBody>
@@ -6647,7 +6647,7 @@
                 <a:latin typeface="Microsoft YaHei"/>
                 <a:ea typeface="Microsoft YaHei"/>
               </a:rPr>
-              <a:t>caict_ai_2024.pdf 第 8 页；caict_ai_2024.pdf 第 10 页；caict_ai_2024.pdf 第 50 页</a:t>
+              <a:t>资料来源：中国信息通信研究院《人工智能发展报告（2024年）》第 8、10、50 页</a:t>
             </a:r>
           </a:p>
         </p:txBody>
@@ -6660,7 +6660,7 @@
         </p:nvSpPr>
         <p:spPr>
           <a:xfrm>
-            <a:off x="685800" y="2225289"/>
+            <a:off x="685800" y="2236621"/>
             <a:ext cx="3403600" cy="19050"/>
           </a:xfrm>
           <a:prstGeom prst="rect">
@@ -6704,7 +6704,7 @@
         </p:nvSpPr>
         <p:spPr>
           <a:xfrm>
-            <a:off x="685800" y="2339589"/>
+            <a:off x="685800" y="2350921"/>
             <a:ext cx="3403600" cy="345288"/>
           </a:xfrm>
           <a:prstGeom prst="rect">
@@ -6744,7 +6744,7 @@
         </p:nvSpPr>
         <p:spPr>
           <a:xfrm>
-            <a:off x="685800" y="2837277"/>
+            <a:off x="685800" y="2848609"/>
             <a:ext cx="3403600" cy="379628"/>
           </a:xfrm>
           <a:prstGeom prst="rect">
@@ -6784,7 +6784,7 @@
         </p:nvSpPr>
         <p:spPr>
           <a:xfrm>
-            <a:off x="685800" y="3312155"/>
+            <a:off x="685800" y="3323487"/>
             <a:ext cx="3403600" cy="732282"/>
           </a:xfrm>
           <a:prstGeom prst="rect">
@@ -6824,8 +6824,8 @@
         </p:nvSpPr>
         <p:spPr>
           <a:xfrm>
-            <a:off x="685800" y="4158737"/>
-            <a:ext cx="3403600" cy="276606"/>
+            <a:off x="685800" y="4170069"/>
+            <a:ext cx="3403600" cy="225095"/>
           </a:xfrm>
           <a:prstGeom prst="rect">
             <a:avLst/>
@@ -6840,18 +6840,18 @@
           <a:p>
             <a:pPr algn="l" eaLnBrk="1" hangingPunct="1" latinLnBrk="0">
               <a:lnSpc>
-                <a:spcPts val="1950"/>
-              </a:lnSpc>
-            </a:pPr>
-            <a:r>
-              <a:rPr sz="1500" b="0" i="0" lang="zh-CN" altLang="en-US">
-                <a:solidFill>
-                  <a:srgbClr val="12355B"/>
-                </a:solidFill>
-                <a:latin typeface="Microsoft YaHei"/>
-                <a:ea typeface="Microsoft YaHei"/>
-              </a:rPr>
-              <a:t>caict_ai_2024.pdf 第8页</a:t>
+                <a:spcPts val="1560"/>
+              </a:lnSpc>
+            </a:pPr>
+            <a:r>
+              <a:rPr sz="1200" b="0" i="0" lang="zh-CN" altLang="en-US">
+                <a:solidFill>
+                  <a:srgbClr val="5F6B78"/>
+                </a:solidFill>
+                <a:latin typeface="Microsoft YaHei"/>
+                <a:ea typeface="Microsoft YaHei"/>
+              </a:rPr>
+              <a:t>第 8 页</a:t>
             </a:r>
           </a:p>
         </p:txBody>
@@ -6864,7 +6864,7 @@
         </p:nvSpPr>
         <p:spPr>
           <a:xfrm>
-            <a:off x="4394200" y="2225289"/>
+            <a:off x="4394200" y="2236621"/>
             <a:ext cx="3403600" cy="19050"/>
           </a:xfrm>
           <a:prstGeom prst="rect">
@@ -6908,7 +6908,7 @@
         </p:nvSpPr>
         <p:spPr>
           <a:xfrm>
-            <a:off x="4394200" y="2339589"/>
+            <a:off x="4394200" y="2350921"/>
             <a:ext cx="3403600" cy="345288"/>
           </a:xfrm>
           <a:prstGeom prst="rect">
@@ -6948,7 +6948,7 @@
         </p:nvSpPr>
         <p:spPr>
           <a:xfrm>
-            <a:off x="4394200" y="2837277"/>
+            <a:off x="4394200" y="2848609"/>
             <a:ext cx="3403600" cy="379628"/>
           </a:xfrm>
           <a:prstGeom prst="rect">
@@ -6988,7 +6988,7 @@
         </p:nvSpPr>
         <p:spPr>
           <a:xfrm>
-            <a:off x="4394200" y="3312155"/>
+            <a:off x="4394200" y="3323487"/>
             <a:ext cx="3403600" cy="732282"/>
           </a:xfrm>
           <a:prstGeom prst="rect">
@@ -7028,8 +7028,8 @@
         </p:nvSpPr>
         <p:spPr>
           <a:xfrm>
-            <a:off x="4394200" y="4158737"/>
-            <a:ext cx="3403600" cy="276606"/>
+            <a:off x="4394200" y="4170069"/>
+            <a:ext cx="3403600" cy="225095"/>
           </a:xfrm>
           <a:prstGeom prst="rect">
             <a:avLst/>
@@ -7044,18 +7044,18 @@
           <a:p>
             <a:pPr algn="l" eaLnBrk="1" hangingPunct="1" latinLnBrk="0">
               <a:lnSpc>
-                <a:spcPts val="1950"/>
-              </a:lnSpc>
-            </a:pPr>
-            <a:r>
-              <a:rPr sz="1500" b="0" i="0" lang="zh-CN" altLang="en-US">
-                <a:solidFill>
-                  <a:srgbClr val="12355B"/>
-                </a:solidFill>
-                <a:latin typeface="Microsoft YaHei"/>
-                <a:ea typeface="Microsoft YaHei"/>
-              </a:rPr>
-              <a:t>caict_ai_2024.pdf 第10页</a:t>
+                <a:spcPts val="1560"/>
+              </a:lnSpc>
+            </a:pPr>
+            <a:r>
+              <a:rPr sz="1200" b="0" i="0" lang="zh-CN" altLang="en-US">
+                <a:solidFill>
+                  <a:srgbClr val="5F6B78"/>
+                </a:solidFill>
+                <a:latin typeface="Microsoft YaHei"/>
+                <a:ea typeface="Microsoft YaHei"/>
+              </a:rPr>
+              <a:t>第 10 页</a:t>
             </a:r>
           </a:p>
         </p:txBody>
@@ -7068,7 +7068,7 @@
         </p:nvSpPr>
         <p:spPr>
           <a:xfrm>
-            <a:off x="8102600" y="2225289"/>
+            <a:off x="8102600" y="2236621"/>
             <a:ext cx="3403600" cy="19050"/>
           </a:xfrm>
           <a:prstGeom prst="rect">
@@ -7112,7 +7112,7 @@
         </p:nvSpPr>
         <p:spPr>
           <a:xfrm>
-            <a:off x="8102600" y="2339589"/>
+            <a:off x="8102600" y="2350921"/>
             <a:ext cx="3403600" cy="345288"/>
           </a:xfrm>
           <a:prstGeom prst="rect">
@@ -7152,7 +7152,7 @@
         </p:nvSpPr>
         <p:spPr>
           <a:xfrm>
-            <a:off x="8102600" y="2837277"/>
+            <a:off x="8102600" y="2848609"/>
             <a:ext cx="3403600" cy="379628"/>
           </a:xfrm>
           <a:prstGeom prst="rect">
@@ -7192,7 +7192,7 @@
         </p:nvSpPr>
         <p:spPr>
           <a:xfrm>
-            <a:off x="8102600" y="3312155"/>
+            <a:off x="8102600" y="3323487"/>
             <a:ext cx="3403600" cy="732282"/>
           </a:xfrm>
           <a:prstGeom prst="rect">
@@ -7232,8 +7232,8 @@
         </p:nvSpPr>
         <p:spPr>
           <a:xfrm>
-            <a:off x="8102600" y="4158737"/>
-            <a:ext cx="3403600" cy="276606"/>
+            <a:off x="8102600" y="4170069"/>
+            <a:ext cx="3403600" cy="225095"/>
           </a:xfrm>
           <a:prstGeom prst="rect">
             <a:avLst/>
@@ -7248,18 +7248,18 @@
           <a:p>
             <a:pPr algn="l" eaLnBrk="1" hangingPunct="1" latinLnBrk="0">
               <a:lnSpc>
-                <a:spcPts val="1950"/>
-              </a:lnSpc>
-            </a:pPr>
-            <a:r>
-              <a:rPr sz="1500" b="0" i="0" lang="zh-CN" altLang="en-US">
-                <a:solidFill>
-                  <a:srgbClr val="12355B"/>
-                </a:solidFill>
-                <a:latin typeface="Microsoft YaHei"/>
-                <a:ea typeface="Microsoft YaHei"/>
-              </a:rPr>
-              <a:t>caict_ai_2024.pdf 第50页</a:t>
+                <a:spcPts val="1560"/>
+              </a:lnSpc>
+            </a:pPr>
+            <a:r>
+              <a:rPr sz="1200" b="0" i="0" lang="zh-CN" altLang="en-US">
+                <a:solidFill>
+                  <a:srgbClr val="5F6B78"/>
+                </a:solidFill>
+                <a:latin typeface="Microsoft YaHei"/>
+                <a:ea typeface="Microsoft YaHei"/>
+              </a:rPr>
+              <a:t>第 50 页</a:t>
             </a:r>
           </a:p>
         </p:txBody>
@@ -7272,7 +7272,7 @@
         </p:nvSpPr>
         <p:spPr>
           <a:xfrm>
-            <a:off x="685800" y="4911593"/>
+            <a:off x="685800" y="4871414"/>
             <a:ext cx="38100" cy="238506"/>
           </a:xfrm>
           <a:prstGeom prst="rect">
@@ -7316,7 +7316,7 @@
         </p:nvSpPr>
         <p:spPr>
           <a:xfrm>
-            <a:off x="857250" y="4892543"/>
+            <a:off x="857250" y="4852364"/>
             <a:ext cx="10648950" cy="276606"/>
           </a:xfrm>
           <a:prstGeom prst="rect">
@@ -7605,7 +7605,7 @@
                 <a:latin typeface="Microsoft YaHei"/>
                 <a:ea typeface="Microsoft YaHei"/>
               </a:rPr>
-              <a:t>cn.investing.com · 八部门：到2027年 我国人工智能关键核心技术实现安全可靠供给</a:t>
+              <a:t>资料来源：cn.investing.com · 八部门：到2027年 我国人工智能关键核心技术…</a:t>
             </a:r>
           </a:p>
         </p:txBody>
@@ -8607,7 +8607,7 @@
                 <a:latin typeface="Microsoft YaHei"/>
                 <a:ea typeface="Microsoft YaHei"/>
               </a:rPr>
-              <a:t>caict_ai_2024.pdf 第 9-10 页；cn.investing.com · 网页资料</a:t>
+              <a:t>资料来源：中国信息通信研究院《人工智能发展报告（2024年）》第 9–10 页；cn.investing.com · 网页资料</a:t>
             </a:r>
           </a:p>
         </p:txBody>
@@ -9387,7 +9387,7 @@
                 <a:latin typeface="Microsoft YaHei"/>
                 <a:ea typeface="Microsoft YaHei"/>
               </a:rPr>
-              <a:t>caict_ai_2024.pdf 第 40 页</a:t>
+              <a:t>资料来源：中国信息通信研究院《人工智能发展报告（2024年）》第 40 页</a:t>
             </a:r>
           </a:p>
         </p:txBody>
@@ -10061,7 +10061,7 @@
                 <a:latin typeface="Microsoft YaHei"/>
                 <a:ea typeface="Microsoft YaHei"/>
               </a:rPr>
-              <a:t>caict_ai_2024.pdf 第 42 页</a:t>
+              <a:t>资料来源：中国信息通信研究院《人工智能发展报告（2024年）》第 42 页</a:t>
             </a:r>
           </a:p>
         </p:txBody>
@@ -10767,7 +10767,7 @@
                 <a:latin typeface="Microsoft YaHei"/>
                 <a:ea typeface="Microsoft YaHei"/>
               </a:rPr>
-              <a:t>caict_ai_2024.pdf 第 43 页、第 48 页</a:t>
+              <a:t>资料来源：中国信息通信研究院《人工智能发展报告（2024年）》第 43、48 页</a:t>
             </a:r>
           </a:p>
         </p:txBody>
@@ -10780,7 +10780,7 @@
         </p:nvSpPr>
         <p:spPr>
           <a:xfrm>
-            <a:off x="685800" y="2146833"/>
+            <a:off x="685800" y="2158166"/>
             <a:ext cx="2476500" cy="19050"/>
           </a:xfrm>
           <a:prstGeom prst="rect">
@@ -10824,7 +10824,7 @@
         </p:nvSpPr>
         <p:spPr>
           <a:xfrm>
-            <a:off x="685800" y="2261133"/>
+            <a:off x="685800" y="2272466"/>
             <a:ext cx="2476500" cy="345288"/>
           </a:xfrm>
           <a:prstGeom prst="rect">
@@ -10864,7 +10864,7 @@
         </p:nvSpPr>
         <p:spPr>
           <a:xfrm>
-            <a:off x="685800" y="2758821"/>
+            <a:off x="685800" y="2770153"/>
             <a:ext cx="2476500" cy="379628"/>
           </a:xfrm>
           <a:prstGeom prst="rect">
@@ -10904,7 +10904,7 @@
         </p:nvSpPr>
         <p:spPr>
           <a:xfrm>
-            <a:off x="685800" y="3233699"/>
+            <a:off x="685800" y="3245032"/>
             <a:ext cx="2476500" cy="732282"/>
           </a:xfrm>
           <a:prstGeom prst="rect">
@@ -10944,8 +10944,8 @@
         </p:nvSpPr>
         <p:spPr>
           <a:xfrm>
-            <a:off x="685800" y="4436897"/>
-            <a:ext cx="2476500" cy="276606"/>
+            <a:off x="685800" y="4448230"/>
+            <a:ext cx="2476500" cy="225095"/>
           </a:xfrm>
           <a:prstGeom prst="rect">
             <a:avLst/>
@@ -10960,18 +10960,18 @@
           <a:p>
             <a:pPr algn="l" eaLnBrk="1" hangingPunct="1" latinLnBrk="0">
               <a:lnSpc>
-                <a:spcPts val="1950"/>
-              </a:lnSpc>
-            </a:pPr>
-            <a:r>
-              <a:rPr sz="1500" b="0" i="0" lang="zh-CN" altLang="en-US">
-                <a:solidFill>
-                  <a:srgbClr val="12355B"/>
-                </a:solidFill>
-                <a:latin typeface="Microsoft YaHei"/>
-                <a:ea typeface="Microsoft YaHei"/>
-              </a:rPr>
-              <a:t>caict_ai_2024.pdf 第43页</a:t>
+                <a:spcPts val="1560"/>
+              </a:lnSpc>
+            </a:pPr>
+            <a:r>
+              <a:rPr sz="1200" b="0" i="0" lang="zh-CN" altLang="en-US">
+                <a:solidFill>
+                  <a:srgbClr val="5F6B78"/>
+                </a:solidFill>
+                <a:latin typeface="Microsoft YaHei"/>
+                <a:ea typeface="Microsoft YaHei"/>
+              </a:rPr>
+              <a:t>第 43 页</a:t>
             </a:r>
           </a:p>
         </p:txBody>
@@ -10984,7 +10984,7 @@
         </p:nvSpPr>
         <p:spPr>
           <a:xfrm>
-            <a:off x="3467100" y="2146833"/>
+            <a:off x="3467100" y="2158166"/>
             <a:ext cx="2476500" cy="19050"/>
           </a:xfrm>
           <a:prstGeom prst="rect">
@@ -11028,7 +11028,7 @@
         </p:nvSpPr>
         <p:spPr>
           <a:xfrm>
-            <a:off x="3467100" y="2261133"/>
+            <a:off x="3467100" y="2272466"/>
             <a:ext cx="2476500" cy="345288"/>
           </a:xfrm>
           <a:prstGeom prst="rect">
@@ -11068,7 +11068,7 @@
         </p:nvSpPr>
         <p:spPr>
           <a:xfrm>
-            <a:off x="3467100" y="2758821"/>
+            <a:off x="3467100" y="2770153"/>
             <a:ext cx="2476500" cy="379628"/>
           </a:xfrm>
           <a:prstGeom prst="rect">
@@ -11108,7 +11108,7 @@
         </p:nvSpPr>
         <p:spPr>
           <a:xfrm>
-            <a:off x="3467100" y="3233699"/>
+            <a:off x="3467100" y="3245032"/>
             <a:ext cx="2476500" cy="1088898"/>
           </a:xfrm>
           <a:prstGeom prst="rect">
@@ -11148,8 +11148,8 @@
         </p:nvSpPr>
         <p:spPr>
           <a:xfrm>
-            <a:off x="3467100" y="4436897"/>
-            <a:ext cx="2476500" cy="276606"/>
+            <a:off x="3467100" y="4448230"/>
+            <a:ext cx="2476500" cy="225095"/>
           </a:xfrm>
           <a:prstGeom prst="rect">
             <a:avLst/>
@@ -11164,18 +11164,18 @@
           <a:p>
             <a:pPr algn="l" eaLnBrk="1" hangingPunct="1" latinLnBrk="0">
               <a:lnSpc>
-                <a:spcPts val="1950"/>
-              </a:lnSpc>
-            </a:pPr>
-            <a:r>
-              <a:rPr sz="1500" b="0" i="0" lang="zh-CN" altLang="en-US">
-                <a:solidFill>
-                  <a:srgbClr val="12355B"/>
-                </a:solidFill>
-                <a:latin typeface="Microsoft YaHei"/>
-                <a:ea typeface="Microsoft YaHei"/>
-              </a:rPr>
-              <a:t>caict_ai_2024.pdf 第43页</a:t>
+                <a:spcPts val="1560"/>
+              </a:lnSpc>
+            </a:pPr>
+            <a:r>
+              <a:rPr sz="1200" b="0" i="0" lang="zh-CN" altLang="en-US">
+                <a:solidFill>
+                  <a:srgbClr val="5F6B78"/>
+                </a:solidFill>
+                <a:latin typeface="Microsoft YaHei"/>
+                <a:ea typeface="Microsoft YaHei"/>
+              </a:rPr>
+              <a:t>第 43 页</a:t>
             </a:r>
           </a:p>
         </p:txBody>
@@ -11188,7 +11188,7 @@
         </p:nvSpPr>
         <p:spPr>
           <a:xfrm>
-            <a:off x="6248400" y="2146833"/>
+            <a:off x="6248400" y="2158166"/>
             <a:ext cx="2476500" cy="19050"/>
           </a:xfrm>
           <a:prstGeom prst="rect">
@@ -11232,7 +11232,7 @@
         </p:nvSpPr>
         <p:spPr>
           <a:xfrm>
-            <a:off x="6248400" y="2261133"/>
+            <a:off x="6248400" y="2272466"/>
             <a:ext cx="2476500" cy="345288"/>
           </a:xfrm>
           <a:prstGeom prst="rect">
@@ -11272,7 +11272,7 @@
         </p:nvSpPr>
         <p:spPr>
           <a:xfrm>
-            <a:off x="6248400" y="2758821"/>
+            <a:off x="6248400" y="2770153"/>
             <a:ext cx="2476500" cy="379628"/>
           </a:xfrm>
           <a:prstGeom prst="rect">
@@ -11312,7 +11312,7 @@
         </p:nvSpPr>
         <p:spPr>
           <a:xfrm>
-            <a:off x="6248400" y="3233699"/>
+            <a:off x="6248400" y="3245032"/>
             <a:ext cx="2247900" cy="732282"/>
           </a:xfrm>
           <a:prstGeom prst="rect">
@@ -11352,8 +11352,8 @@
         </p:nvSpPr>
         <p:spPr>
           <a:xfrm>
-            <a:off x="6248400" y="4436897"/>
-            <a:ext cx="2476500" cy="276606"/>
+            <a:off x="6248400" y="4448230"/>
+            <a:ext cx="2476500" cy="225095"/>
           </a:xfrm>
           <a:prstGeom prst="rect">
             <a:avLst/>
@@ -11368,18 +11368,18 @@
           <a:p>
             <a:pPr algn="l" eaLnBrk="1" hangingPunct="1" latinLnBrk="0">
               <a:lnSpc>
-                <a:spcPts val="1950"/>
-              </a:lnSpc>
-            </a:pPr>
-            <a:r>
-              <a:rPr sz="1500" b="0" i="0" lang="zh-CN" altLang="en-US">
-                <a:solidFill>
-                  <a:srgbClr val="12355B"/>
-                </a:solidFill>
-                <a:latin typeface="Microsoft YaHei"/>
-                <a:ea typeface="Microsoft YaHei"/>
-              </a:rPr>
-              <a:t>caict_ai_2024.pdf 第43页</a:t>
+                <a:spcPts val="1560"/>
+              </a:lnSpc>
+            </a:pPr>
+            <a:r>
+              <a:rPr sz="1200" b="0" i="0" lang="zh-CN" altLang="en-US">
+                <a:solidFill>
+                  <a:srgbClr val="5F6B78"/>
+                </a:solidFill>
+                <a:latin typeface="Microsoft YaHei"/>
+                <a:ea typeface="Microsoft YaHei"/>
+              </a:rPr>
+              <a:t>第 43 页</a:t>
             </a:r>
           </a:p>
         </p:txBody>
@@ -11392,7 +11392,7 @@
         </p:nvSpPr>
         <p:spPr>
           <a:xfrm>
-            <a:off x="9029700" y="2146833"/>
+            <a:off x="9029700" y="2158166"/>
             <a:ext cx="2476500" cy="19050"/>
           </a:xfrm>
           <a:prstGeom prst="rect">
@@ -11436,7 +11436,7 @@
         </p:nvSpPr>
         <p:spPr>
           <a:xfrm>
-            <a:off x="9029700" y="2261133"/>
+            <a:off x="9029700" y="2272466"/>
             <a:ext cx="2476500" cy="345288"/>
           </a:xfrm>
           <a:prstGeom prst="rect">
@@ -11476,7 +11476,7 @@
         </p:nvSpPr>
         <p:spPr>
           <a:xfrm>
-            <a:off x="9029700" y="2758821"/>
+            <a:off x="9029700" y="2770153"/>
             <a:ext cx="2476500" cy="379628"/>
           </a:xfrm>
           <a:prstGeom prst="rect">
@@ -11516,7 +11516,7 @@
         </p:nvSpPr>
         <p:spPr>
           <a:xfrm>
-            <a:off x="9029700" y="3233699"/>
+            <a:off x="9029700" y="3245032"/>
             <a:ext cx="2476500" cy="1088898"/>
           </a:xfrm>
           <a:prstGeom prst="rect">
@@ -11556,8 +11556,8 @@
         </p:nvSpPr>
         <p:spPr>
           <a:xfrm>
-            <a:off x="9029700" y="4436897"/>
-            <a:ext cx="2476500" cy="276606"/>
+            <a:off x="9029700" y="4448230"/>
+            <a:ext cx="2476500" cy="225095"/>
           </a:xfrm>
           <a:prstGeom prst="rect">
             <a:avLst/>
@@ -11572,18 +11572,18 @@
           <a:p>
             <a:pPr algn="l" eaLnBrk="1" hangingPunct="1" latinLnBrk="0">
               <a:lnSpc>
-                <a:spcPts val="1950"/>
-              </a:lnSpc>
-            </a:pPr>
-            <a:r>
-              <a:rPr sz="1500" b="0" i="0" lang="zh-CN" altLang="en-US">
-                <a:solidFill>
-                  <a:srgbClr val="12355B"/>
-                </a:solidFill>
-                <a:latin typeface="Microsoft YaHei"/>
-                <a:ea typeface="Microsoft YaHei"/>
-              </a:rPr>
-              <a:t>caict_ai_2024.pdf 第48页</a:t>
+                <a:spcPts val="1560"/>
+              </a:lnSpc>
+            </a:pPr>
+            <a:r>
+              <a:rPr sz="1200" b="0" i="0" lang="zh-CN" altLang="en-US">
+                <a:solidFill>
+                  <a:srgbClr val="5F6B78"/>
+                </a:solidFill>
+                <a:latin typeface="Microsoft YaHei"/>
+                <a:ea typeface="Microsoft YaHei"/>
+              </a:rPr>
+              <a:t>第 48 页</a:t>
             </a:r>
           </a:p>
         </p:txBody>
@@ -11596,7 +11596,7 @@
         </p:nvSpPr>
         <p:spPr>
           <a:xfrm>
-            <a:off x="685800" y="5189753"/>
+            <a:off x="685800" y="5149575"/>
             <a:ext cx="38100" cy="238506"/>
           </a:xfrm>
           <a:prstGeom prst="rect">
@@ -11640,7 +11640,7 @@
         </p:nvSpPr>
         <p:spPr>
           <a:xfrm>
-            <a:off x="857250" y="5170703"/>
+            <a:off x="857250" y="5130525"/>
             <a:ext cx="10648950" cy="276606"/>
           </a:xfrm>
           <a:prstGeom prst="rect">
@@ -11929,7 +11929,7 @@
                 <a:latin typeface="Microsoft YaHei"/>
                 <a:ea typeface="Microsoft YaHei"/>
               </a:rPr>
-              <a:t>caict_ai_2024.pdf 第 52—53、57 页</a:t>
+              <a:t>资料来源：中国信息通信研究院《人工智能发展报告（2024年）》第 52–53、57 页</a:t>
             </a:r>
           </a:p>
         </p:txBody>
@@ -12611,7 +12611,7 @@
                 <a:latin typeface="Microsoft YaHei"/>
                 <a:ea typeface="Microsoft YaHei"/>
               </a:rPr>
-              <a:t>caict_ai_2024.pdf 第 60 页；caict_ai_2024.pdf 第 62-63 页</a:t>
+              <a:t>资料来源：中国信息通信研究院《人工智能发展报告（2024年）》第 60、62–63 页</a:t>
             </a:r>
           </a:p>
         </p:txBody>
@@ -14541,7 +14541,7 @@
                 <a:latin typeface="Microsoft YaHei"/>
                 <a:ea typeface="Microsoft YaHei"/>
               </a:rPr>
-              <a:t>caict_ai_2024.pdf 第 7-13 页；www.toutiao.com · 2024年终盘点｜ AI进入发展下半场 亟需加速精细化落地应用</a:t>
+              <a:t>资料来源：中国信息通信研究院《人工智能发展报告（2024年）》第 7–13 页；toutiao.com · 2024年终盘点｜ AI进入发展下半场 亟需加…</a:t>
             </a:r>
           </a:p>
         </p:txBody>
@@ -15215,7 +15215,7 @@
                 <a:latin typeface="Microsoft YaHei"/>
                 <a:ea typeface="Microsoft YaHei"/>
               </a:rPr>
-              <a:t>caict_ai_2024.pdf 第 7、9、10、11 页；www.idc.com · IDC - 智能体安全：2026年AI落地过程中最容易被低估的治理挑战</a:t>
+              <a:t>资料来源：中国信息通信研究院《人工智能发展报告（2024年）》第 7、9、10、11 页；idc.com · IDC - 智能体安全：2026年AI落地过程…</a:t>
             </a:r>
           </a:p>
         </p:txBody>
@@ -15228,7 +15228,7 @@
         </p:nvSpPr>
         <p:spPr>
           <a:xfrm>
-            <a:off x="685800" y="2150320"/>
+            <a:off x="685800" y="2158166"/>
             <a:ext cx="3403600" cy="19050"/>
           </a:xfrm>
           <a:prstGeom prst="rect">
@@ -15272,8 +15272,8 @@
         </p:nvSpPr>
         <p:spPr>
           <a:xfrm>
-            <a:off x="685800" y="2264620"/>
-            <a:ext cx="3403600" cy="293776"/>
+            <a:off x="685800" y="2272466"/>
+            <a:ext cx="3403600" cy="345288"/>
           </a:xfrm>
           <a:prstGeom prst="rect">
             <a:avLst/>
@@ -15288,11 +15288,11 @@
           <a:p>
             <a:pPr algn="l" eaLnBrk="1" hangingPunct="1" latinLnBrk="0">
               <a:lnSpc>
-                <a:spcPts val="2080"/>
-              </a:lnSpc>
-            </a:pPr>
-            <a:r>
-              <a:rPr sz="1600" b="1" i="0">
+                <a:spcPts val="2470"/>
+              </a:lnSpc>
+            </a:pPr>
+            <a:r>
+              <a:rPr sz="1900" b="1" i="0">
                 <a:solidFill>
                   <a:srgbClr val="D9822B"/>
                 </a:solidFill>
@@ -15312,8 +15312,8 @@
         </p:nvSpPr>
         <p:spPr>
           <a:xfrm>
-            <a:off x="685800" y="2710797"/>
-            <a:ext cx="3403600" cy="345288"/>
+            <a:off x="685800" y="2770153"/>
+            <a:ext cx="3403600" cy="379628"/>
           </a:xfrm>
           <a:prstGeom prst="rect">
             <a:avLst/>
@@ -15328,11 +15328,11 @@
           <a:p>
             <a:pPr algn="l" eaLnBrk="1" hangingPunct="1" latinLnBrk="0">
               <a:lnSpc>
-                <a:spcPts val="2470"/>
-              </a:lnSpc>
-            </a:pPr>
-            <a:r>
-              <a:rPr sz="1900" b="1" i="0" lang="zh-CN" altLang="en-US">
+                <a:spcPts val="2730"/>
+              </a:lnSpc>
+            </a:pPr>
+            <a:r>
+              <a:rPr sz="2100" b="1" i="0" lang="zh-CN" altLang="en-US">
                 <a:solidFill>
                   <a:srgbClr val="1A1F26"/>
                 </a:solidFill>
@@ -15352,8 +15352,8 @@
         </p:nvSpPr>
         <p:spPr>
           <a:xfrm>
-            <a:off x="685800" y="3151334"/>
-            <a:ext cx="3403600" cy="970026"/>
+            <a:off x="685800" y="3245032"/>
+            <a:ext cx="3403600" cy="1088898"/>
           </a:xfrm>
           <a:prstGeom prst="rect">
             <a:avLst/>
@@ -15368,11 +15368,11 @@
           <a:p>
             <a:pPr algn="l" eaLnBrk="1" hangingPunct="1" latinLnBrk="0">
               <a:lnSpc>
-                <a:spcPts val="2400"/>
-              </a:lnSpc>
-            </a:pPr>
-            <a:r>
-              <a:rPr sz="1600" b="0" i="0" lang="zh-CN" altLang="en-US">
+                <a:spcPts val="2700"/>
+              </a:lnSpc>
+            </a:pPr>
+            <a:r>
+              <a:rPr sz="1800" b="0" i="0" lang="zh-CN" altLang="en-US">
                 <a:solidFill>
                   <a:srgbClr val="1A1F26"/>
                 </a:solidFill>
@@ -15392,8 +15392,8 @@
         </p:nvSpPr>
         <p:spPr>
           <a:xfrm>
-            <a:off x="685800" y="4458876"/>
-            <a:ext cx="3403600" cy="242265"/>
+            <a:off x="685800" y="4448230"/>
+            <a:ext cx="3403600" cy="225095"/>
           </a:xfrm>
           <a:prstGeom prst="rect">
             <a:avLst/>
@@ -15408,18 +15408,18 @@
           <a:p>
             <a:pPr algn="l" eaLnBrk="1" hangingPunct="1" latinLnBrk="0">
               <a:lnSpc>
-                <a:spcPts val="1690"/>
-              </a:lnSpc>
-            </a:pPr>
-            <a:r>
-              <a:rPr sz="1300" b="0" i="0" lang="zh-CN" altLang="en-US">
-                <a:solidFill>
-                  <a:srgbClr val="12355B"/>
-                </a:solidFill>
-                <a:latin typeface="Microsoft YaHei"/>
-                <a:ea typeface="Microsoft YaHei"/>
-              </a:rPr>
-              <a:t>caict_ai_2024.pdf 第7、9页</a:t>
+                <a:spcPts val="1560"/>
+              </a:lnSpc>
+            </a:pPr>
+            <a:r>
+              <a:rPr sz="1200" b="0" i="0" lang="zh-CN" altLang="en-US">
+                <a:solidFill>
+                  <a:srgbClr val="5F6B78"/>
+                </a:solidFill>
+                <a:latin typeface="Microsoft YaHei"/>
+                <a:ea typeface="Microsoft YaHei"/>
+              </a:rPr>
+              <a:t>第 7、9 页</a:t>
             </a:r>
           </a:p>
         </p:txBody>
@@ -15432,7 +15432,7 @@
         </p:nvSpPr>
         <p:spPr>
           <a:xfrm>
-            <a:off x="4394200" y="2150320"/>
+            <a:off x="4394200" y="2158166"/>
             <a:ext cx="3403600" cy="19050"/>
           </a:xfrm>
           <a:prstGeom prst="rect">
@@ -15476,8 +15476,8 @@
         </p:nvSpPr>
         <p:spPr>
           <a:xfrm>
-            <a:off x="4394200" y="2264620"/>
-            <a:ext cx="3403600" cy="293776"/>
+            <a:off x="4394200" y="2272466"/>
+            <a:ext cx="3403600" cy="345288"/>
           </a:xfrm>
           <a:prstGeom prst="rect">
             <a:avLst/>
@@ -15492,11 +15492,11 @@
           <a:p>
             <a:pPr algn="l" eaLnBrk="1" hangingPunct="1" latinLnBrk="0">
               <a:lnSpc>
-                <a:spcPts val="2080"/>
-              </a:lnSpc>
-            </a:pPr>
-            <a:r>
-              <a:rPr sz="1600" b="1" i="0">
+                <a:spcPts val="2470"/>
+              </a:lnSpc>
+            </a:pPr>
+            <a:r>
+              <a:rPr sz="1900" b="1" i="0">
                 <a:solidFill>
                   <a:srgbClr val="D9822B"/>
                 </a:solidFill>
@@ -15516,8 +15516,8 @@
         </p:nvSpPr>
         <p:spPr>
           <a:xfrm>
-            <a:off x="4394200" y="2710797"/>
-            <a:ext cx="3403600" cy="345288"/>
+            <a:off x="4394200" y="2770153"/>
+            <a:ext cx="3403600" cy="379628"/>
           </a:xfrm>
           <a:prstGeom prst="rect">
             <a:avLst/>
@@ -15532,11 +15532,11 @@
           <a:p>
             <a:pPr algn="l" eaLnBrk="1" hangingPunct="1" latinLnBrk="0">
               <a:lnSpc>
-                <a:spcPts val="2470"/>
-              </a:lnSpc>
-            </a:pPr>
-            <a:r>
-              <a:rPr sz="1900" b="1" i="0" lang="zh-CN" altLang="en-US">
+                <a:spcPts val="2730"/>
+              </a:lnSpc>
+            </a:pPr>
+            <a:r>
+              <a:rPr sz="2100" b="1" i="0" lang="zh-CN" altLang="en-US">
                 <a:solidFill>
                   <a:srgbClr val="1A1F26"/>
                 </a:solidFill>
@@ -15556,8 +15556,8 @@
         </p:nvSpPr>
         <p:spPr>
           <a:xfrm>
-            <a:off x="4394200" y="3151334"/>
-            <a:ext cx="3200400" cy="970026"/>
+            <a:off x="4394200" y="3245032"/>
+            <a:ext cx="3403600" cy="1088898"/>
           </a:xfrm>
           <a:prstGeom prst="rect">
             <a:avLst/>
@@ -15572,11 +15572,11 @@
           <a:p>
             <a:pPr algn="l" eaLnBrk="1" hangingPunct="1" latinLnBrk="0">
               <a:lnSpc>
-                <a:spcPts val="2400"/>
-              </a:lnSpc>
-            </a:pPr>
-            <a:r>
-              <a:rPr sz="1600" b="0" i="0" lang="zh-CN" altLang="en-US">
+                <a:spcPts val="2700"/>
+              </a:lnSpc>
+            </a:pPr>
+            <a:r>
+              <a:rPr sz="1800" b="0" i="0" lang="zh-CN" altLang="en-US">
                 <a:solidFill>
                   <a:srgbClr val="1A1F26"/>
                 </a:solidFill>
@@ -15596,8 +15596,8 @@
         </p:nvSpPr>
         <p:spPr>
           <a:xfrm>
-            <a:off x="4394200" y="4458876"/>
-            <a:ext cx="3403600" cy="242265"/>
+            <a:off x="4394200" y="4448230"/>
+            <a:ext cx="3403600" cy="225095"/>
           </a:xfrm>
           <a:prstGeom prst="rect">
             <a:avLst/>
@@ -15612,18 +15612,18 @@
           <a:p>
             <a:pPr algn="l" eaLnBrk="1" hangingPunct="1" latinLnBrk="0">
               <a:lnSpc>
-                <a:spcPts val="1690"/>
-              </a:lnSpc>
-            </a:pPr>
-            <a:r>
-              <a:rPr sz="1300" b="0" i="0" lang="zh-CN" altLang="en-US">
-                <a:solidFill>
-                  <a:srgbClr val="12355B"/>
-                </a:solidFill>
-                <a:latin typeface="Microsoft YaHei"/>
-                <a:ea typeface="Microsoft YaHei"/>
-              </a:rPr>
-              <a:t>caict_ai_2024.pdf 第9、10页</a:t>
+                <a:spcPts val="1560"/>
+              </a:lnSpc>
+            </a:pPr>
+            <a:r>
+              <a:rPr sz="1200" b="0" i="0" lang="zh-CN" altLang="en-US">
+                <a:solidFill>
+                  <a:srgbClr val="5F6B78"/>
+                </a:solidFill>
+                <a:latin typeface="Microsoft YaHei"/>
+                <a:ea typeface="Microsoft YaHei"/>
+              </a:rPr>
+              <a:t>第 9、10 页</a:t>
             </a:r>
           </a:p>
         </p:txBody>
@@ -15636,7 +15636,7 @@
         </p:nvSpPr>
         <p:spPr>
           <a:xfrm>
-            <a:off x="8102600" y="2150320"/>
+            <a:off x="8102600" y="2158166"/>
             <a:ext cx="3403600" cy="19050"/>
           </a:xfrm>
           <a:prstGeom prst="rect">
@@ -15680,8 +15680,8 @@
         </p:nvSpPr>
         <p:spPr>
           <a:xfrm>
-            <a:off x="8102600" y="2264620"/>
-            <a:ext cx="3403600" cy="293776"/>
+            <a:off x="8102600" y="2272466"/>
+            <a:ext cx="3403600" cy="345288"/>
           </a:xfrm>
           <a:prstGeom prst="rect">
             <a:avLst/>
@@ -15696,11 +15696,11 @@
           <a:p>
             <a:pPr algn="l" eaLnBrk="1" hangingPunct="1" latinLnBrk="0">
               <a:lnSpc>
-                <a:spcPts val="2080"/>
-              </a:lnSpc>
-            </a:pPr>
-            <a:r>
-              <a:rPr sz="1600" b="1" i="0">
+                <a:spcPts val="2470"/>
+              </a:lnSpc>
+            </a:pPr>
+            <a:r>
+              <a:rPr sz="1900" b="1" i="0">
                 <a:solidFill>
                   <a:srgbClr val="D9822B"/>
                 </a:solidFill>
@@ -15720,8 +15720,8 @@
         </p:nvSpPr>
         <p:spPr>
           <a:xfrm>
-            <a:off x="8102600" y="2710797"/>
-            <a:ext cx="3403600" cy="345288"/>
+            <a:off x="8102600" y="2770153"/>
+            <a:ext cx="3403600" cy="379628"/>
           </a:xfrm>
           <a:prstGeom prst="rect">
             <a:avLst/>
@@ -15736,11 +15736,11 @@
           <a:p>
             <a:pPr algn="l" eaLnBrk="1" hangingPunct="1" latinLnBrk="0">
               <a:lnSpc>
-                <a:spcPts val="2470"/>
-              </a:lnSpc>
-            </a:pPr>
-            <a:r>
-              <a:rPr sz="1900" b="1" i="0" lang="zh-CN" altLang="en-US">
+                <a:spcPts val="2730"/>
+              </a:lnSpc>
+            </a:pPr>
+            <a:r>
+              <a:rPr sz="2100" b="1" i="0" lang="zh-CN" altLang="en-US">
                 <a:solidFill>
                   <a:srgbClr val="1A1F26"/>
                 </a:solidFill>
@@ -15760,8 +15760,8 @@
         </p:nvSpPr>
         <p:spPr>
           <a:xfrm>
-            <a:off x="8102600" y="3151334"/>
-            <a:ext cx="3403600" cy="970026"/>
+            <a:off x="8102600" y="3245032"/>
+            <a:ext cx="3403600" cy="1088898"/>
           </a:xfrm>
           <a:prstGeom prst="rect">
             <a:avLst/>
@@ -15776,11 +15776,11 @@
           <a:p>
             <a:pPr algn="l" eaLnBrk="1" hangingPunct="1" latinLnBrk="0">
               <a:lnSpc>
-                <a:spcPts val="2400"/>
-              </a:lnSpc>
-            </a:pPr>
-            <a:r>
-              <a:rPr sz="1600" b="0" i="0" lang="zh-CN" altLang="en-US">
+                <a:spcPts val="2700"/>
+              </a:lnSpc>
+            </a:pPr>
+            <a:r>
+              <a:rPr sz="1800" b="0" i="0" lang="zh-CN" altLang="en-US">
                 <a:solidFill>
                   <a:srgbClr val="1A1F26"/>
                 </a:solidFill>
@@ -15800,8 +15800,8 @@
         </p:nvSpPr>
         <p:spPr>
           <a:xfrm>
-            <a:off x="8102600" y="4235660"/>
-            <a:ext cx="3403600" cy="465480"/>
+            <a:off x="8102600" y="4448230"/>
+            <a:ext cx="3403600" cy="225095"/>
           </a:xfrm>
           <a:prstGeom prst="rect">
             <a:avLst/>
@@ -15816,18 +15816,18 @@
           <a:p>
             <a:pPr algn="l" eaLnBrk="1" hangingPunct="1" latinLnBrk="0">
               <a:lnSpc>
-                <a:spcPts val="1690"/>
-              </a:lnSpc>
-            </a:pPr>
-            <a:r>
-              <a:rPr sz="1300" b="0" i="0" lang="zh-CN" altLang="en-US">
-                <a:solidFill>
-                  <a:srgbClr val="12355B"/>
-                </a:solidFill>
-                <a:latin typeface="Microsoft YaHei"/>
-                <a:ea typeface="Microsoft YaHei"/>
-              </a:rPr>
-              <a:t>caict_ai_2024.pdf 第11页；IDC网页 第1页</a:t>
+                <a:spcPts val="1560"/>
+              </a:lnSpc>
+            </a:pPr>
+            <a:r>
+              <a:rPr sz="1200" b="0" i="0" lang="zh-CN" altLang="en-US">
+                <a:solidFill>
+                  <a:srgbClr val="5F6B78"/>
+                </a:solidFill>
+                <a:latin typeface="Microsoft YaHei"/>
+                <a:ea typeface="Microsoft YaHei"/>
+              </a:rPr>
+              <a:t>第 11 页；IDC网页 第 1 页</a:t>
             </a:r>
           </a:p>
         </p:txBody>
@@ -15840,7 +15840,7 @@
         </p:nvSpPr>
         <p:spPr>
           <a:xfrm>
-            <a:off x="685800" y="5177391"/>
+            <a:off x="685800" y="5149575"/>
             <a:ext cx="38100" cy="238506"/>
           </a:xfrm>
           <a:prstGeom prst="rect">
@@ -15884,7 +15884,7 @@
         </p:nvSpPr>
         <p:spPr>
           <a:xfrm>
-            <a:off x="857250" y="5158341"/>
+            <a:off x="857250" y="5130525"/>
             <a:ext cx="10648950" cy="276606"/>
           </a:xfrm>
           <a:prstGeom prst="rect">
@@ -16173,7 +16173,7 @@
                 <a:latin typeface="Microsoft YaHei"/>
                 <a:ea typeface="Microsoft YaHei"/>
               </a:rPr>
-              <a:t>caict_ai_2024.pdf 第 12 页</a:t>
+              <a:t>资料来源：中国信息通信研究院《人工智能发展报告（2024年）》第 12 页</a:t>
             </a:r>
           </a:p>
         </p:txBody>
@@ -16847,7 +16847,7 @@
                 <a:latin typeface="Microsoft YaHei"/>
                 <a:ea typeface="Microsoft YaHei"/>
               </a:rPr>
-              <a:t>caict_ai_2024.pdf 第 12 页；caict_ai_2024.pdf 第 13 页；221.179.172.81 · 网页资料</a:t>
+              <a:t>资料来源：中国信息通信研究院《人工智能发展报告（2024年）》第 12、13 页；221.179.172.81 · 网页资料</a:t>
             </a:r>
           </a:p>
         </p:txBody>
@@ -17621,7 +17621,7 @@
                 <a:latin typeface="Microsoft YaHei"/>
                 <a:ea typeface="Microsoft YaHei"/>
               </a:rPr>
-              <a:t>caict_ai_2024.pdf 第 12 页；cn.wicinternet.org · 网页资料</a:t>
+              <a:t>资料来源：中国信息通信研究院《人工智能发展报告（2024年）》第 12 页；cn.wicinternet.org · 网页资料</a:t>
             </a:r>
           </a:p>
         </p:txBody>
@@ -18495,7 +18495,7 @@
                 <a:latin typeface="Microsoft YaHei"/>
                 <a:ea typeface="Microsoft YaHei"/>
               </a:rPr>
-              <a:t>caict_ai_2024.pdf 第 14-15、30-35 页；intl.cloud.baidu.com · 从Scaling Law到数据效率：AI模型架构演进的技术哲学</a:t>
+              <a:t>资料来源：《人工智能发展报告（2024年）》第 14–15、30–35 页；intl.cloud.baidu.com · 从Scaling Law到数据效率：AI模型架…</a:t>
             </a:r>
           </a:p>
         </p:txBody>
@@ -19497,7 +19497,7 @@
                 <a:latin typeface="Microsoft YaHei"/>
                 <a:ea typeface="Microsoft YaHei"/>
               </a:rPr>
-              <a:t>caict_ai_2024.pdf 第 14-17、23-25 页；intl.cloud.baidu.com · 从Scaling Law到数据效率：AI模型架构演进的技术哲学</a:t>
+              <a:t>资料来源：《人工智能发展报告（2024年）》第 14–17、23–25 页；intl.cloud.baidu.com · 从Scaling Law到数据效率：AI模型架…</a:t>
             </a:r>
           </a:p>
         </p:txBody>
